--- a/PPTs/L5-Exercises old.pptx
+++ b/PPTs/L5-Exercises old.pptx
@@ -3949,7 +3949,7 @@
               <a:rPr lang="en-US" altLang="ko-KR" sz="2800" baseline="-25000" dirty="0">
                 <a:sym typeface="Symbol" panose="05050102010706020507" pitchFamily="18" charset="2"/>
               </a:rPr>
-              <a:t>n</a:t>
+              <a:t>n+1</a:t>
             </a:r>
             <a:r>
               <a:rPr lang="en-US" altLang="ko-KR" sz="2800" dirty="0">
@@ -3961,7 +3961,7 @@
               <a:rPr lang="en-US" altLang="ko-KR" sz="2800" baseline="-25000" dirty="0">
                 <a:sym typeface="Symbol" panose="05050102010706020507" pitchFamily="18" charset="2"/>
               </a:rPr>
-              <a:t>n-1</a:t>
+              <a:t>n</a:t>
             </a:r>
             <a:r>
               <a:rPr lang="en-US" altLang="ko-KR" sz="2800" dirty="0">
@@ -3973,7 +3973,7 @@
               <a:rPr lang="en-US" altLang="ko-KR" sz="2800" baseline="-25000" dirty="0">
                 <a:sym typeface="Symbol" panose="05050102010706020507" pitchFamily="18" charset="2"/>
               </a:rPr>
-              <a:t>n-1</a:t>
+              <a:t>n</a:t>
             </a:r>
             <a:r>
               <a:rPr lang="en-US" altLang="ko-KR" sz="2800" dirty="0">
